--- a/Weekly Reports/slides/3-ethan-bishop.pptx
+++ b/Weekly Reports/slides/3-ethan-bishop.pptx
@@ -5,7 +5,9 @@
     <p:sldMasterId id="2147483648" r:id="rId1"/>
   </p:sldMasterIdLst>
   <p:sldIdLst>
-    <p:sldId id="260" r:id="rId5"/>
+    <p:sldId id="261" r:id="rId2"/>
+    <p:sldId id="262" r:id="rId3"/>
+    <p:sldId id="263" r:id="rId4"/>
   </p:sldIdLst>
   <p:sldSz cx="12192000" cy="6858000"/>
   <p:notesSz cx="6858000" cy="9144000"/>
@@ -259,7 +261,7 @@
           <a:p>
             <a:fld id="{752E6B35-DAD5-CF47-9E65-9CA12B499D8C}" type="datetimeFigureOut">
               <a:rPr lang="en-US" smtClean="0"/>
-              <a:t>9/14/2026</a:t>
+              <a:t>9/22/2026</a:t>
             </a:fld>
             <a:endParaRPr lang="en-US"/>
           </a:p>
@@ -457,7 +459,7 @@
           <a:p>
             <a:fld id="{752E6B35-DAD5-CF47-9E65-9CA12B499D8C}" type="datetimeFigureOut">
               <a:rPr lang="en-US" smtClean="0"/>
-              <a:t>9/14/2026</a:t>
+              <a:t>9/22/2026</a:t>
             </a:fld>
             <a:endParaRPr lang="en-US"/>
           </a:p>
@@ -665,7 +667,7 @@
           <a:p>
             <a:fld id="{752E6B35-DAD5-CF47-9E65-9CA12B499D8C}" type="datetimeFigureOut">
               <a:rPr lang="en-US" smtClean="0"/>
-              <a:t>9/14/2026</a:t>
+              <a:t>9/22/2026</a:t>
             </a:fld>
             <a:endParaRPr lang="en-US"/>
           </a:p>
@@ -863,7 +865,7 @@
           <a:p>
             <a:fld id="{752E6B35-DAD5-CF47-9E65-9CA12B499D8C}" type="datetimeFigureOut">
               <a:rPr lang="en-US" smtClean="0"/>
-              <a:t>9/14/2026</a:t>
+              <a:t>9/22/2026</a:t>
             </a:fld>
             <a:endParaRPr lang="en-US"/>
           </a:p>
@@ -1138,7 +1140,7 @@
           <a:p>
             <a:fld id="{752E6B35-DAD5-CF47-9E65-9CA12B499D8C}" type="datetimeFigureOut">
               <a:rPr lang="en-US" smtClean="0"/>
-              <a:t>9/14/2026</a:t>
+              <a:t>9/22/2026</a:t>
             </a:fld>
             <a:endParaRPr lang="en-US"/>
           </a:p>
@@ -1403,7 +1405,7 @@
           <a:p>
             <a:fld id="{752E6B35-DAD5-CF47-9E65-9CA12B499D8C}" type="datetimeFigureOut">
               <a:rPr lang="en-US" smtClean="0"/>
-              <a:t>9/14/2026</a:t>
+              <a:t>9/22/2026</a:t>
             </a:fld>
             <a:endParaRPr lang="en-US"/>
           </a:p>
@@ -1815,7 +1817,7 @@
           <a:p>
             <a:fld id="{752E6B35-DAD5-CF47-9E65-9CA12B499D8C}" type="datetimeFigureOut">
               <a:rPr lang="en-US" smtClean="0"/>
-              <a:t>9/14/2026</a:t>
+              <a:t>9/22/2026</a:t>
             </a:fld>
             <a:endParaRPr lang="en-US"/>
           </a:p>
@@ -1956,7 +1958,7 @@
           <a:p>
             <a:fld id="{752E6B35-DAD5-CF47-9E65-9CA12B499D8C}" type="datetimeFigureOut">
               <a:rPr lang="en-US" smtClean="0"/>
-              <a:t>9/14/2026</a:t>
+              <a:t>9/22/2026</a:t>
             </a:fld>
             <a:endParaRPr lang="en-US"/>
           </a:p>
@@ -2069,7 +2071,7 @@
           <a:p>
             <a:fld id="{752E6B35-DAD5-CF47-9E65-9CA12B499D8C}" type="datetimeFigureOut">
               <a:rPr lang="en-US" smtClean="0"/>
-              <a:t>9/14/2026</a:t>
+              <a:t>9/22/2026</a:t>
             </a:fld>
             <a:endParaRPr lang="en-US"/>
           </a:p>
@@ -2380,7 +2382,7 @@
           <a:p>
             <a:fld id="{752E6B35-DAD5-CF47-9E65-9CA12B499D8C}" type="datetimeFigureOut">
               <a:rPr lang="en-US" smtClean="0"/>
-              <a:t>9/14/2026</a:t>
+              <a:t>9/22/2026</a:t>
             </a:fld>
             <a:endParaRPr lang="en-US"/>
           </a:p>
@@ -2668,7 +2670,7 @@
           <a:p>
             <a:fld id="{752E6B35-DAD5-CF47-9E65-9CA12B499D8C}" type="datetimeFigureOut">
               <a:rPr lang="en-US" smtClean="0"/>
-              <a:t>9/14/2026</a:t>
+              <a:t>9/22/2026</a:t>
             </a:fld>
             <a:endParaRPr lang="en-US"/>
           </a:p>
@@ -2909,7 +2911,7 @@
           <a:p>
             <a:fld id="{752E6B35-DAD5-CF47-9E65-9CA12B499D8C}" type="datetimeFigureOut">
               <a:rPr lang="en-US" smtClean="0"/>
-              <a:t>9/14/2026</a:t>
+              <a:t>9/22/2026</a:t>
             </a:fld>
             <a:endParaRPr lang="en-US"/>
           </a:p>
@@ -3309,7 +3311,7 @@
 </p:sldMaster>
 </file>
 
-<file path=ppt/slides/slide4.xml><?xml version="1.0" encoding="utf-8"?>
+<file path=ppt/slides/slide1.xml><?xml version="1.0" encoding="utf-8"?>
 <p:sld xmlns:a="http://schemas.openxmlformats.org/drawingml/2006/main" xmlns:r="http://schemas.openxmlformats.org/officeDocument/2006/relationships" xmlns:p="http://schemas.openxmlformats.org/presentationml/2006/main">
   <p:cSld>
     <p:spTree>
@@ -3317,7 +3319,7 @@
         <p:cNvPr id="1" name="">
           <a:extLst>
             <a:ext uri="{FF2B5EF4-FFF2-40B4-BE49-F238E27FC236}">
-              <a16:creationId xmlns:a16="http://schemas.microsoft.com/office/drawing/2014/main" id="{40461179-12E8-72E0-11E2-D91A146F4F17}"/>
+              <a16:creationId xmlns:a16="http://schemas.microsoft.com/office/drawing/2014/main" id="{447F74E5-A961-0960-D504-80FB9375C0BC}"/>
             </a:ext>
           </a:extLst>
         </p:cNvPr>
@@ -3337,7 +3339,7 @@
           <p:cNvPr id="2" name="Title 1">
             <a:extLst>
               <a:ext uri="{FF2B5EF4-FFF2-40B4-BE49-F238E27FC236}">
-                <a16:creationId xmlns:a16="http://schemas.microsoft.com/office/drawing/2014/main" id="{7424A086-AE83-6431-D3A6-AD69F5E4DA99}"/>
+                <a16:creationId xmlns:a16="http://schemas.microsoft.com/office/drawing/2014/main" id="{CA76FC7E-8FDD-2F27-67FA-E2218F392105}"/>
               </a:ext>
             </a:extLst>
           </p:cNvPr>
@@ -3365,7 +3367,7 @@
           <p:cNvPr id="3" name="Content Placeholder 2">
             <a:extLst>
               <a:ext uri="{FF2B5EF4-FFF2-40B4-BE49-F238E27FC236}">
-                <a16:creationId xmlns:a16="http://schemas.microsoft.com/office/drawing/2014/main" id="{E21CE5BE-C8C4-DF75-0622-1767719853DF}"/>
+                <a16:creationId xmlns:a16="http://schemas.microsoft.com/office/drawing/2014/main" id="{D86F5DE5-5483-2694-9071-A7F6146E03D8}"/>
               </a:ext>
             </a:extLst>
           </p:cNvPr>
@@ -3398,21 +3400,14 @@
             <a:pPr lvl="1"/>
             <a:r>
               <a:rPr lang="en-US" dirty="0"/>
-              <a:t>Test IMU for Accuracy</a:t>
+              <a:t>Test Pi HAT motor controllers</a:t>
             </a:r>
           </a:p>
           <a:p>
             <a:pPr lvl="1"/>
             <a:r>
               <a:rPr lang="en-US" dirty="0"/>
-              <a:t>Research Motor Controller options</a:t>
-            </a:r>
-          </a:p>
-          <a:p>
-            <a:pPr lvl="1"/>
-            <a:r>
-              <a:rPr lang="en-US" dirty="0"/>
-              <a:t>Set up home 3D printer to test chassis components</a:t>
+              <a:t>Write code to integrate IMU on to Raspberry Pi</a:t>
             </a:r>
           </a:p>
           <a:p>
@@ -3425,21 +3420,14 @@
             <a:pPr lvl="1"/>
             <a:r>
               <a:rPr lang="en-US" dirty="0"/>
-              <a:t>Tested IMU for measurement accuracy</a:t>
+              <a:t>Wrote code for HAT motor controllers to test for operational accuracy</a:t>
             </a:r>
           </a:p>
           <a:p>
             <a:pPr lvl="1"/>
             <a:r>
               <a:rPr lang="en-US" dirty="0"/>
-              <a:t>Researched Motor Controller for most optimal option</a:t>
-            </a:r>
-          </a:p>
-          <a:p>
-            <a:pPr lvl="1"/>
-            <a:r>
-              <a:rPr lang="en-US" dirty="0"/>
-              <a:t>Drying out filament for chassis component testing</a:t>
+              <a:t>Continue implementing IMU on Raspberry Pi</a:t>
             </a:r>
           </a:p>
           <a:p>
@@ -3452,32 +3440,34 @@
             <a:pPr lvl="1"/>
             <a:r>
               <a:rPr lang="en-US" dirty="0"/>
-              <a:t>Select and </a:t>
-            </a:r>
-            <a:r>
-              <a:rPr lang="en-US"/>
-              <a:t>order Motor </a:t>
-            </a:r>
+              <a:t>Finish testing HAT motor controllers</a:t>
+            </a:r>
+          </a:p>
+          <a:p>
+            <a:pPr lvl="1"/>
             <a:r>
               <a:rPr lang="en-US" dirty="0"/>
-              <a:t>Controller</a:t>
+              <a:t>Finish IMU implementation on Raspberry Pi</a:t>
             </a:r>
           </a:p>
           <a:p>
             <a:pPr lvl="1"/>
             <a:r>
               <a:rPr lang="en-US" dirty="0"/>
-              <a:t>Write code to integrate IMU onto </a:t>
+              <a:t>Research 3D printing </a:t>
             </a:r>
             <a:r>
               <a:rPr lang="en-US" dirty="0" err="1"/>
-              <a:t>RaspberryPi</a:t>
-            </a:r>
-            <a:endParaRPr lang="en-US" dirty="0"/>
-          </a:p>
-          <a:p>
-            <a:r>
-              <a:rPr b="1" dirty="0"/>
+              <a:t>stl</a:t>
+            </a:r>
+            <a:r>
+              <a:rPr lang="en-US" dirty="0"/>
+              <a:t> files for the chassis</a:t>
+            </a:r>
+          </a:p>
+          <a:p>
+            <a:r>
+              <a:rPr lang="en-US" b="1" dirty="0"/>
               <a:t>Hours spent on progress</a:t>
             </a:r>
           </a:p>
@@ -3497,7 +3487,331 @@
     </p:spTree>
     <p:extLst>
       <p:ext uri="{BB962C8B-B14F-4D97-AF65-F5344CB8AC3E}">
-        <p14:creationId xmlns:p14="http://schemas.microsoft.com/office/powerpoint/2010/main" val="2701754284"/>
+        <p14:creationId xmlns:p14="http://schemas.microsoft.com/office/powerpoint/2010/main" val="2071750997"/>
+      </p:ext>
+    </p:extLst>
+  </p:cSld>
+  <p:clrMapOvr>
+    <a:masterClrMapping/>
+  </p:clrMapOvr>
+</p:sld>
+</file>
+
+<file path=ppt/slides/slide2.xml><?xml version="1.0" encoding="utf-8"?>
+<p:sld xmlns:a="http://schemas.openxmlformats.org/drawingml/2006/main" xmlns:r="http://schemas.openxmlformats.org/officeDocument/2006/relationships" xmlns:p="http://schemas.openxmlformats.org/presentationml/2006/main">
+  <p:cSld>
+    <p:spTree>
+      <p:nvGrpSpPr>
+        <p:cNvPr id="1" name=""/>
+        <p:cNvGrpSpPr/>
+        <p:nvPr/>
+      </p:nvGrpSpPr>
+      <p:grpSpPr>
+        <a:xfrm>
+          <a:off x="0" y="0"/>
+          <a:ext cx="0" cy="0"/>
+          <a:chOff x="0" y="0"/>
+          <a:chExt cx="0" cy="0"/>
+        </a:xfrm>
+      </p:grpSpPr>
+      <p:sp>
+        <p:nvSpPr>
+          <p:cNvPr id="2" name="Title 1">
+            <a:extLst>
+              <a:ext uri="{FF2B5EF4-FFF2-40B4-BE49-F238E27FC236}">
+                <a16:creationId xmlns:a16="http://schemas.microsoft.com/office/drawing/2014/main" id="{53FEEEB8-08CD-6129-4FE3-46D75E68ECFD}"/>
+              </a:ext>
+            </a:extLst>
+          </p:cNvPr>
+          <p:cNvSpPr>
+            <a:spLocks noGrp="1"/>
+          </p:cNvSpPr>
+          <p:nvPr>
+            <p:ph type="title"/>
+          </p:nvPr>
+        </p:nvSpPr>
+        <p:spPr/>
+        <p:txBody>
+          <a:bodyPr/>
+          <a:lstStyle/>
+          <a:p>
+            <a:r>
+              <a:rPr lang="en-US" dirty="0"/>
+              <a:t>IMU Testing</a:t>
+            </a:r>
+          </a:p>
+        </p:txBody>
+      </p:sp>
+      <p:sp>
+        <p:nvSpPr>
+          <p:cNvPr id="3" name="Content Placeholder 2">
+            <a:extLst>
+              <a:ext uri="{FF2B5EF4-FFF2-40B4-BE49-F238E27FC236}">
+                <a16:creationId xmlns:a16="http://schemas.microsoft.com/office/drawing/2014/main" id="{34B0CA42-869D-B9EF-62B2-9195359C5BF1}"/>
+              </a:ext>
+            </a:extLst>
+          </p:cNvPr>
+          <p:cNvSpPr>
+            <a:spLocks noGrp="1"/>
+          </p:cNvSpPr>
+          <p:nvPr>
+            <p:ph idx="1"/>
+          </p:nvPr>
+        </p:nvSpPr>
+        <p:spPr>
+          <a:xfrm>
+            <a:off x="838200" y="1909011"/>
+            <a:ext cx="4359442" cy="4267952"/>
+          </a:xfrm>
+        </p:spPr>
+        <p:txBody>
+          <a:bodyPr/>
+          <a:lstStyle/>
+          <a:p>
+            <a:r>
+              <a:rPr lang="en-US" dirty="0"/>
+              <a:t>Verification of the measurements and directions</a:t>
+            </a:r>
+          </a:p>
+        </p:txBody>
+      </p:sp>
+      <p:pic>
+        <p:nvPicPr>
+          <p:cNvPr id="5" name="Picture 4">
+            <a:extLst>
+              <a:ext uri="{FF2B5EF4-FFF2-40B4-BE49-F238E27FC236}">
+                <a16:creationId xmlns:a16="http://schemas.microsoft.com/office/drawing/2014/main" id="{CF965BBB-7C6B-15DF-8F54-B015E4225F1B}"/>
+              </a:ext>
+            </a:extLst>
+          </p:cNvPr>
+          <p:cNvPicPr>
+            <a:picLocks noChangeAspect="1"/>
+          </p:cNvPicPr>
+          <p:nvPr/>
+        </p:nvPicPr>
+        <p:blipFill>
+          <a:blip r:embed="rId2"/>
+          <a:srcRect l="6875" r="57368"/>
+          <a:stretch>
+            <a:fillRect/>
+          </a:stretch>
+        </p:blipFill>
+        <p:spPr>
+          <a:xfrm>
+            <a:off x="6292516" y="685505"/>
+            <a:ext cx="4359442" cy="5807370"/>
+          </a:xfrm>
+          <a:prstGeom prst="rect">
+            <a:avLst/>
+          </a:prstGeom>
+        </p:spPr>
+      </p:pic>
+      <p:pic>
+        <p:nvPicPr>
+          <p:cNvPr id="7" name="Picture 6">
+            <a:extLst>
+              <a:ext uri="{FF2B5EF4-FFF2-40B4-BE49-F238E27FC236}">
+                <a16:creationId xmlns:a16="http://schemas.microsoft.com/office/drawing/2014/main" id="{2F298E4A-E172-1F6F-B604-DD9A9E2072DE}"/>
+              </a:ext>
+            </a:extLst>
+          </p:cNvPr>
+          <p:cNvPicPr>
+            <a:picLocks noChangeAspect="1"/>
+          </p:cNvPicPr>
+          <p:nvPr/>
+        </p:nvPicPr>
+        <p:blipFill>
+          <a:blip r:embed="rId3"/>
+          <a:srcRect l="19562" t="10881" r="16871" b="22056"/>
+          <a:stretch>
+            <a:fillRect/>
+          </a:stretch>
+        </p:blipFill>
+        <p:spPr>
+          <a:xfrm>
+            <a:off x="1540042" y="3287740"/>
+            <a:ext cx="3651504" cy="2889223"/>
+          </a:xfrm>
+          <a:prstGeom prst="rect">
+            <a:avLst/>
+          </a:prstGeom>
+        </p:spPr>
+      </p:pic>
+    </p:spTree>
+    <p:extLst>
+      <p:ext uri="{BB962C8B-B14F-4D97-AF65-F5344CB8AC3E}">
+        <p14:creationId xmlns:p14="http://schemas.microsoft.com/office/powerpoint/2010/main" val="4108033796"/>
+      </p:ext>
+    </p:extLst>
+  </p:cSld>
+  <p:clrMapOvr>
+    <a:masterClrMapping/>
+  </p:clrMapOvr>
+</p:sld>
+</file>
+
+<file path=ppt/slides/slide3.xml><?xml version="1.0" encoding="utf-8"?>
+<p:sld xmlns:a="http://schemas.openxmlformats.org/drawingml/2006/main" xmlns:r="http://schemas.openxmlformats.org/officeDocument/2006/relationships" xmlns:p="http://schemas.openxmlformats.org/presentationml/2006/main">
+  <p:cSld>
+    <p:spTree>
+      <p:nvGrpSpPr>
+        <p:cNvPr id="1" name=""/>
+        <p:cNvGrpSpPr/>
+        <p:nvPr/>
+      </p:nvGrpSpPr>
+      <p:grpSpPr>
+        <a:xfrm>
+          <a:off x="0" y="0"/>
+          <a:ext cx="0" cy="0"/>
+          <a:chOff x="0" y="0"/>
+          <a:chExt cx="0" cy="0"/>
+        </a:xfrm>
+      </p:grpSpPr>
+      <p:sp>
+        <p:nvSpPr>
+          <p:cNvPr id="2" name="Title 1">
+            <a:extLst>
+              <a:ext uri="{FF2B5EF4-FFF2-40B4-BE49-F238E27FC236}">
+                <a16:creationId xmlns:a16="http://schemas.microsoft.com/office/drawing/2014/main" id="{C008595A-A3F6-ADDB-57AA-2749239B7BF4}"/>
+              </a:ext>
+            </a:extLst>
+          </p:cNvPr>
+          <p:cNvSpPr>
+            <a:spLocks noGrp="1"/>
+          </p:cNvSpPr>
+          <p:nvPr>
+            <p:ph type="title"/>
+          </p:nvPr>
+        </p:nvSpPr>
+        <p:spPr/>
+        <p:txBody>
+          <a:bodyPr/>
+          <a:lstStyle/>
+          <a:p>
+            <a:r>
+              <a:rPr lang="en-US" dirty="0"/>
+              <a:t>Motor Controller Testing</a:t>
+            </a:r>
+          </a:p>
+        </p:txBody>
+      </p:sp>
+      <p:sp>
+        <p:nvSpPr>
+          <p:cNvPr id="3" name="Content Placeholder 2">
+            <a:extLst>
+              <a:ext uri="{FF2B5EF4-FFF2-40B4-BE49-F238E27FC236}">
+                <a16:creationId xmlns:a16="http://schemas.microsoft.com/office/drawing/2014/main" id="{BC8636D0-E227-1A91-601D-A3B3810613E3}"/>
+              </a:ext>
+            </a:extLst>
+          </p:cNvPr>
+          <p:cNvSpPr>
+            <a:spLocks noGrp="1"/>
+          </p:cNvSpPr>
+          <p:nvPr>
+            <p:ph idx="1"/>
+          </p:nvPr>
+        </p:nvSpPr>
+        <p:spPr>
+          <a:xfrm>
+            <a:off x="838200" y="1925053"/>
+            <a:ext cx="5803232" cy="4251910"/>
+          </a:xfrm>
+        </p:spPr>
+        <p:txBody>
+          <a:bodyPr/>
+          <a:lstStyle/>
+          <a:p>
+            <a:r>
+              <a:rPr lang="en-US" dirty="0"/>
+              <a:t>Ordered Pi HAT motor controllers</a:t>
+            </a:r>
+          </a:p>
+          <a:p>
+            <a:pPr lvl="1"/>
+            <a:r>
+              <a:rPr lang="en-US" dirty="0"/>
+              <a:t>2WD HAT motor controller</a:t>
+            </a:r>
+          </a:p>
+          <a:p>
+            <a:pPr lvl="1"/>
+            <a:r>
+              <a:rPr lang="en-US" dirty="0"/>
+              <a:t>4WD HAT motor controller</a:t>
+            </a:r>
+          </a:p>
+          <a:p>
+            <a:r>
+              <a:rPr lang="en-US" dirty="0"/>
+              <a:t>Made the motor controller code to test for operational accuracy</a:t>
+            </a:r>
+          </a:p>
+        </p:txBody>
+      </p:sp>
+      <p:pic>
+        <p:nvPicPr>
+          <p:cNvPr id="7" name="Picture 6">
+            <a:extLst>
+              <a:ext uri="{FF2B5EF4-FFF2-40B4-BE49-F238E27FC236}">
+                <a16:creationId xmlns:a16="http://schemas.microsoft.com/office/drawing/2014/main" id="{EE74271F-2A08-5A7A-C164-9C55E1985D14}"/>
+              </a:ext>
+            </a:extLst>
+          </p:cNvPr>
+          <p:cNvPicPr>
+            <a:picLocks noChangeAspect="1"/>
+          </p:cNvPicPr>
+          <p:nvPr/>
+        </p:nvPicPr>
+        <p:blipFill>
+          <a:blip r:embed="rId2"/>
+          <a:stretch>
+            <a:fillRect/>
+          </a:stretch>
+        </p:blipFill>
+        <p:spPr>
+          <a:xfrm>
+            <a:off x="6915150" y="736308"/>
+            <a:ext cx="4438650" cy="2143125"/>
+          </a:xfrm>
+          <a:prstGeom prst="rect">
+            <a:avLst/>
+          </a:prstGeom>
+        </p:spPr>
+      </p:pic>
+      <p:pic>
+        <p:nvPicPr>
+          <p:cNvPr id="9" name="Picture 8">
+            <a:extLst>
+              <a:ext uri="{FF2B5EF4-FFF2-40B4-BE49-F238E27FC236}">
+                <a16:creationId xmlns:a16="http://schemas.microsoft.com/office/drawing/2014/main" id="{4A68BB2F-4530-0B18-BCB1-0A1ACC9F586C}"/>
+              </a:ext>
+            </a:extLst>
+          </p:cNvPr>
+          <p:cNvPicPr>
+            <a:picLocks noChangeAspect="1"/>
+          </p:cNvPicPr>
+          <p:nvPr/>
+        </p:nvPicPr>
+        <p:blipFill>
+          <a:blip r:embed="rId3"/>
+          <a:stretch>
+            <a:fillRect/>
+          </a:stretch>
+        </p:blipFill>
+        <p:spPr>
+          <a:xfrm>
+            <a:off x="6915150" y="2960980"/>
+            <a:ext cx="4094187" cy="3531895"/>
+          </a:xfrm>
+          <a:prstGeom prst="rect">
+            <a:avLst/>
+          </a:prstGeom>
+        </p:spPr>
+      </p:pic>
+    </p:spTree>
+    <p:extLst>
+      <p:ext uri="{BB962C8B-B14F-4D97-AF65-F5344CB8AC3E}">
+        <p14:creationId xmlns:p14="http://schemas.microsoft.com/office/powerpoint/2010/main" val="3077754255"/>
       </p:ext>
     </p:extLst>
   </p:cSld>
